--- a/lessons-v2/day02/day02.pptx
+++ b/lessons-v2/day02/day02.pptx
@@ -519,17 +519,20 @@
           <a:p>
             <a:r>
               <a:rPr lang="en-US" dirty="0"/>
-              <a:t>RUN SHEET (90 min):
-00:00 Journey check + hook
-00:05 The hardware that matters: CPU / RAM / disk
-00:20 Program vs process
-00:35 Source code -&gt; running process
-00:50 The OS as referee (isolation, user vs kernel)
-00:58 Why a bug can become control (the seed)
-01:05 Hands-on: your own machine
-01:20 Wrap + homework
-CUT FIRST IF SHORT: the "interpreted languages" sub-point; the segfault demo (keep the htop part).
-NEVER CUT: program vs process, OS isolation, the "bug becomes control" seed, the hands-on.</a:t>
+              <a:t>RUN SHEET (~86 min planned):
+00:00 Journey check + hook (htop on the projector)        5
+00:05 The hardware that matters: CPU / RAM / disk        13
+00:18 Program vs process                                 10
+00:28 Source code -&gt; running process                      7
+00:35 WHY A BUG BECOMES CONTROL (the peak — teach fresh) 12
+00:47 The OS as referee + user/kernel + isolation        14
+01:01 Hands-on: your own machine                         18
+01:19 Wrap + homework                                     5
+CUT FIRST IF SHORT: the "interpreted languages" sub-point; the "referee is a defence" slide
+(fold into recap). Instructor-only crash demo can be dropped for the recording.
+NEVER CUT: program vs process, the "bug becomes control" seed, the hands-on steps 1-3.
+ONE ANALOGY all lesson: kitchen — chef=CPU, counter=RAM, pantry=disk, head chef on the pass=OS,
+walk-in freezer=kernel mode. Do not introduce a second analogy.</a:t>
             </a:r>
             <a:endParaRPr lang="en-US" dirty="0"/>
           </a:p>
@@ -617,10 +620,12 @@
           <a:p>
             <a:r>
               <a:rPr lang="en-US" dirty="0"/>
-              <a:t>Isolation is a security property: a bug or malware in one process shouldn't be able to read
-your password manager's memory. (Shouldn't. Attacks on this exist — later.)
-This referee role is why the OS is the layer attackers most want to control and defenders
-most want to harden — Week 2 is all about it.</a:t>
+              <a:t>Draw it: a row of boxes on the board. [ input box (20) ][ ...other stuff... ][ where-to-go-back ].
+Scribble the input box overflowing rightward into "where-to-go-back".
+We are NOT exploiting anything today. The takeaway is one sentence, say it twice:
+"a crash bug and 'the attacker runs their code' are usually the SAME bug — that's why
+memory-safety bugs are treated as critical."
+This is a "buffer overflow". They'll hear the term; they don't need more than this today.</a:t>
             </a:r>
             <a:endParaRPr lang="en-US" dirty="0"/>
           </a:p>
@@ -708,10 +713,8 @@
           <a:p>
             <a:r>
               <a:rPr lang="en-US" dirty="0"/>
-              <a:t>Analogy: a bank. Customers (user mode) fill in a slip and hand it to a teller. Only staff
-(kernel mode) go into the vault. A system call is the slip.
-Why it matters: if attacker code is stuck in user mode it's limited. "Privilege escalation"
-(Day 7, Day 17) is the attacker trying to get from downstairs to upstairs.</a:t>
+              <a:t>One line each. The point isn't the mechanism — it's that defence is layered and already built
+in. Don't let a keen student pull you into ROP/bypasses; "Week 4".</a:t>
             </a:r>
             <a:endParaRPr lang="en-US" dirty="0"/>
           </a:p>
@@ -799,7 +802,10 @@
           <a:p>
             <a:r>
               <a:rPr lang="en-US" dirty="0"/>
-              <a:t>Slow down here. This is the "aha" that makes exploitation make sense later.</a:t>
+              <a:t>Extend the kitchen: the OS is the head chef running the pass — deciding who cooks what, when,
+and keeping each cook at their own station.
+This referee role is why the OS is the layer attackers most want to control and defenders most
+want to harden — Week 2 is all about it.</a:t>
             </a:r>
             <a:endParaRPr lang="en-US" dirty="0"/>
           </a:p>
@@ -887,12 +893,10 @@
           <a:p>
             <a:r>
               <a:rPr lang="en-US" dirty="0"/>
-              <a:t>Concrete-but-gentle: a program reads your name into a box sized for 20 characters. You send
-5,000 characters. The extra spills past the box and overwrites the "where to go back to"
-value on the stack. When the function returns, the CPU jumps to an address the attacker put
-there.
-We are NOT exploiting anything today. The point is: a "crash bug" and "attacker runs their
-code" are the same underlying flaw. That's why memory-safety bugs are treated as critical.</a:t>
+              <a:t>Stay in the kitchen: line cooks (user mode) can't walk into the walk-in freezer / dry store
+(kernel mode) — they call out an order to the person who can (a system call). One analogy all
+lesson: chef=CPU, counter=RAM, pantry=disk, head chef on the pass=OS, freezer=kernel.
+Why it matters: attacker code stuck in user mode is limited to what that user can do.</a:t>
             </a:r>
             <a:endParaRPr lang="en-US" dirty="0"/>
           </a:p>
@@ -980,8 +984,8 @@
           <a:p>
             <a:r>
               <a:rPr lang="en-US" dirty="0"/>
-              <a:t>One line each. Students don't need depth now — they need to know defence is layered and
-built into the OS and compiler. We come back to these when we actually do exploitation (W4).</a:t>
+              <a:t>Ties the OS section back to the "defences" idea. Isolation + least privilege are the two
+biggest structural defences and both come from the OS. Forward-ref privilege escalation.</a:t>
             </a:r>
             <a:endParaRPr lang="en-US" dirty="0"/>
           </a:p>
@@ -1069,10 +1073,11 @@
           <a:p>
             <a:r>
               <a:rPr lang="en-US" dirty="0"/>
-              <a:t>Everyone should get through steps 1-3. Step 4 is the segfault demo — cut it if time is tight.
-crash.py does `ctypes.string_at(0)` — a read from address 0, which the OS forbids -&gt; instant kill.
-Point: the OS caught it and contained it. That containment is the referee doing its job.
-Walk the room. Windows users: Task Manager -&gt; Details tab shows PID; right-click -&gt; End task.</a:t>
+              <a:t>Students do steps 1-3 (all three, everyone). Step 4 is INSTRUCTOR-ONLY on the Linux projector
+machine — `python3 assets/crash.py` reads address 0 and segfaults cleanly on Linux; on Windows
+it often surfaces as a catchable OSError, so don't have students run it.
+Pre-flight the night before and record assets/crash-demo.mp4 as the fallback.
+Windows students: Task Manager -&gt; Details tab shows PID; right-click -&gt; End task.</a:t>
             </a:r>
             <a:endParaRPr lang="en-US" dirty="0"/>
           </a:p>
@@ -2063,9 +2068,8 @@
           <a:p>
             <a:r>
               <a:rPr lang="en-US" dirty="0"/>
-              <a:t>Keep this light — no diagrams of stack frames yet. The one part that matters for the security
-seed: the stack holds RETURN ADDRESSES — "when this function finishes, jump back to here."
-That's data. Sitting in the same RAM as everything else. Remember that for two slides' time.</a:t>
+              <a:t>This is the intellectual peak of the lesson — teach it now, while the room is fresh, not at
+the end. Budget ~12 minutes. Slow right down.</a:t>
             </a:r>
             <a:endParaRPr lang="en-US" dirty="0"/>
           </a:p>
